--- a/assets/templates/IdeaRun2026-PPT-Template.pptx
+++ b/assets/templates/IdeaRun2026-PPT-Template.pptx
@@ -3090,21 +3090,9 @@
   <p:cSld>
     <p:bg>
       <p:bgPr>
-        <a:gradFill rotWithShape="1">
-          <a:gsLst>
-            <a:gs pos="0">
-              <a:srgbClr val="000000">
-                <a:alpha val="100000"/>
-              </a:srgbClr>
-            </a:gs>
-            <a:gs pos="100000">
-              <a:srgbClr val="3432C7">
-                <a:alpha val="100000"/>
-              </a:srgbClr>
-            </a:gs>
-          </a:gsLst>
-          <a:lin ang="5400000"/>
-        </a:gradFill>
+        <a:solidFill>
+          <a:srgbClr val="00321A"/>
+        </a:solidFill>
         <a:effectLst/>
       </p:bgPr>
     </p:bg>
@@ -3122,9 +3110,55 @@
           <a:chExt cx="0" cy="0"/>
         </a:xfrm>
       </p:grpSpPr>
+      <p:sp>
+        <p:nvSpPr>
+          <p:cNvPr id="2" name="Freeform 2"/>
+          <p:cNvSpPr/>
+          <p:nvPr/>
+        </p:nvSpPr>
+        <p:spPr>
+          <a:xfrm>
+            <a:off x="0" y="0"/>
+            <a:ext cx="18288000" cy="10287000"/>
+          </a:xfrm>
+          <a:custGeom>
+            <a:avLst/>
+            <a:gdLst/>
+            <a:ahLst/>
+            <a:cxnLst/>
+            <a:rect l="l" t="t" r="r" b="b"/>
+            <a:pathLst>
+              <a:path w="18288000" h="10287000">
+                <a:moveTo>
+                  <a:pt x="0" y="0"/>
+                </a:moveTo>
+                <a:lnTo>
+                  <a:pt x="18288000" y="0"/>
+                </a:lnTo>
+                <a:lnTo>
+                  <a:pt x="18288000" y="10287000"/>
+                </a:lnTo>
+                <a:lnTo>
+                  <a:pt x="0" y="10287000"/>
+                </a:lnTo>
+                <a:lnTo>
+                  <a:pt x="0" y="0"/>
+                </a:lnTo>
+                <a:close/>
+              </a:path>
+            </a:pathLst>
+          </a:custGeom>
+          <a:blipFill>
+            <a:blip r:embed="rId1"/>
+            <a:stretch>
+              <a:fillRect l="-700" t="-10915" b="-8582"/>
+            </a:stretch>
+          </a:blipFill>
+        </p:spPr>
+      </p:sp>
       <p:grpSp>
         <p:nvGrpSpPr>
-          <p:cNvPr id="2" name="Group 2"/>
+          <p:cNvPr id="3" name="Group 3"/>
           <p:cNvGrpSpPr/>
           <p:nvPr/>
         </p:nvGrpSpPr>
@@ -3138,7 +3172,7 @@
         </p:grpSpPr>
         <p:sp>
           <p:nvSpPr>
-            <p:cNvPr id="3" name="Freeform 3"/>
+            <p:cNvPr id="4" name="Freeform 4"/>
             <p:cNvSpPr/>
             <p:nvPr/>
           </p:nvSpPr>
@@ -3221,7 +3255,7 @@
         </p:sp>
         <p:sp>
           <p:nvSpPr>
-            <p:cNvPr id="4" name="TextBox 4"/>
+            <p:cNvPr id="5" name="TextBox 5"/>
             <p:cNvSpPr txBox="1"/>
             <p:nvPr/>
           </p:nvSpPr>
@@ -3252,7 +3286,7 @@
       </p:grpSp>
       <p:grpSp>
         <p:nvGrpSpPr>
-          <p:cNvPr id="5" name="Group 5"/>
+          <p:cNvPr id="6" name="Group 6"/>
           <p:cNvGrpSpPr/>
           <p:nvPr/>
         </p:nvGrpSpPr>
@@ -3266,7 +3300,7 @@
         </p:grpSpPr>
         <p:sp>
           <p:nvSpPr>
-            <p:cNvPr id="6" name="Freeform 6"/>
+            <p:cNvPr id="7" name="Freeform 7"/>
             <p:cNvSpPr/>
             <p:nvPr/>
           </p:nvSpPr>
@@ -3349,7 +3383,7 @@
         </p:sp>
         <p:sp>
           <p:nvSpPr>
-            <p:cNvPr id="7" name="TextBox 7"/>
+            <p:cNvPr id="8" name="TextBox 8"/>
             <p:cNvSpPr txBox="1"/>
             <p:nvPr/>
           </p:nvSpPr>
@@ -3380,7 +3414,7 @@
       </p:grpSp>
       <p:grpSp>
         <p:nvGrpSpPr>
-          <p:cNvPr id="8" name="Group 8"/>
+          <p:cNvPr id="9" name="Group 9"/>
           <p:cNvGrpSpPr/>
           <p:nvPr/>
         </p:nvGrpSpPr>
@@ -3394,7 +3428,7 @@
         </p:grpSpPr>
         <p:sp>
           <p:nvSpPr>
-            <p:cNvPr id="9" name="Freeform 9"/>
+            <p:cNvPr id="10" name="Freeform 10"/>
             <p:cNvSpPr/>
             <p:nvPr/>
           </p:nvSpPr>
@@ -3431,7 +3465,7 @@
               </a:pathLst>
             </a:custGeom>
             <a:blipFill>
-              <a:blip r:embed="rId1"/>
+              <a:blip r:embed="rId2"/>
               <a:stretch>
                 <a:fillRect t="-47772" r="-44513" b="-431558"/>
               </a:stretch>
@@ -3440,7 +3474,7 @@
         </p:sp>
         <p:sp>
           <p:nvSpPr>
-            <p:cNvPr id="10" name="Freeform 10"/>
+            <p:cNvPr id="11" name="Freeform 11"/>
             <p:cNvSpPr/>
             <p:nvPr/>
           </p:nvSpPr>
@@ -3477,7 +3511,7 @@
               </a:pathLst>
             </a:custGeom>
             <a:blipFill>
-              <a:blip r:embed="rId2"/>
+              <a:blip r:embed="rId3"/>
               <a:stretch>
                 <a:fillRect l="-268445" t="-197976" r="-50614" b="-207671"/>
               </a:stretch>
@@ -3487,7 +3521,7 @@
       </p:grpSp>
       <p:sp>
         <p:nvSpPr>
-          <p:cNvPr id="11" name="Freeform 11"/>
+          <p:cNvPr id="12" name="Freeform 12"/>
           <p:cNvSpPr/>
           <p:nvPr/>
         </p:nvSpPr>
@@ -3524,7 +3558,7 @@
             </a:pathLst>
           </a:custGeom>
           <a:blipFill>
-            <a:blip r:embed="rId3"/>
+            <a:blip r:embed="rId4"/>
             <a:stretch>
               <a:fillRect l="-17937" r="-18993" b="-27200"/>
             </a:stretch>
@@ -3533,7 +3567,7 @@
       </p:sp>
       <p:sp>
         <p:nvSpPr>
-          <p:cNvPr id="12" name="Freeform 12"/>
+          <p:cNvPr id="13" name="Freeform 13"/>
           <p:cNvSpPr/>
           <p:nvPr/>
         </p:nvSpPr>
@@ -3570,7 +3604,7 @@
             </a:pathLst>
           </a:custGeom>
           <a:blipFill>
-            <a:blip r:embed="rId4"/>
+            <a:blip r:embed="rId5"/>
             <a:stretch>
               <a:fillRect t="-57217" b="-42188"/>
             </a:stretch>
@@ -3579,7 +3613,7 @@
       </p:sp>
       <p:sp>
         <p:nvSpPr>
-          <p:cNvPr id="13" name="TextBox 13"/>
+          <p:cNvPr id="14" name="TextBox 14"/>
           <p:cNvSpPr txBox="1"/>
           <p:nvPr/>
         </p:nvSpPr>
@@ -3629,7 +3663,7 @@
       </p:sp>
       <p:sp>
         <p:nvSpPr>
-          <p:cNvPr id="14" name="TextBox 14"/>
+          <p:cNvPr id="15" name="TextBox 15"/>
           <p:cNvSpPr txBox="1"/>
           <p:nvPr/>
         </p:nvSpPr>
@@ -3734,9 +3768,55 @@
           <a:chExt cx="0" cy="0"/>
         </a:xfrm>
       </p:grpSpPr>
+      <p:sp>
+        <p:nvSpPr>
+          <p:cNvPr id="2" name="Freeform 2"/>
+          <p:cNvSpPr/>
+          <p:nvPr/>
+        </p:nvSpPr>
+        <p:spPr>
+          <a:xfrm>
+            <a:off x="0" y="0"/>
+            <a:ext cx="18288000" cy="10287000"/>
+          </a:xfrm>
+          <a:custGeom>
+            <a:avLst/>
+            <a:gdLst/>
+            <a:ahLst/>
+            <a:cxnLst/>
+            <a:rect l="l" t="t" r="r" b="b"/>
+            <a:pathLst>
+              <a:path w="18288000" h="10287000">
+                <a:moveTo>
+                  <a:pt x="0" y="0"/>
+                </a:moveTo>
+                <a:lnTo>
+                  <a:pt x="18288000" y="0"/>
+                </a:lnTo>
+                <a:lnTo>
+                  <a:pt x="18288000" y="10287000"/>
+                </a:lnTo>
+                <a:lnTo>
+                  <a:pt x="0" y="10287000"/>
+                </a:lnTo>
+                <a:lnTo>
+                  <a:pt x="0" y="0"/>
+                </a:lnTo>
+                <a:close/>
+              </a:path>
+            </a:pathLst>
+          </a:custGeom>
+          <a:blipFill>
+            <a:blip r:embed="rId1"/>
+            <a:stretch>
+              <a:fillRect l="-700" t="-10915" b="-8582"/>
+            </a:stretch>
+          </a:blipFill>
+        </p:spPr>
+      </p:sp>
       <p:grpSp>
         <p:nvGrpSpPr>
-          <p:cNvPr id="2" name="Group 2"/>
+          <p:cNvPr id="3" name="Group 3"/>
           <p:cNvGrpSpPr/>
           <p:nvPr/>
         </p:nvGrpSpPr>
@@ -3750,7 +3830,7 @@
         </p:grpSpPr>
         <p:sp>
           <p:nvSpPr>
-            <p:cNvPr id="3" name="Freeform 3"/>
+            <p:cNvPr id="4" name="Freeform 4"/>
             <p:cNvSpPr/>
             <p:nvPr/>
           </p:nvSpPr>
@@ -3813,7 +3893,7 @@
         </p:sp>
         <p:sp>
           <p:nvSpPr>
-            <p:cNvPr id="4" name="TextBox 4"/>
+            <p:cNvPr id="5" name="TextBox 5"/>
             <p:cNvSpPr txBox="1"/>
             <p:nvPr/>
           </p:nvSpPr>
@@ -3844,7 +3924,7 @@
       </p:grpSp>
       <p:grpSp>
         <p:nvGrpSpPr>
-          <p:cNvPr id="5" name="Group 5"/>
+          <p:cNvPr id="6" name="Group 6"/>
           <p:cNvGrpSpPr/>
           <p:nvPr/>
         </p:nvGrpSpPr>
@@ -3858,7 +3938,7 @@
         </p:grpSpPr>
         <p:sp>
           <p:nvSpPr>
-            <p:cNvPr id="6" name="Freeform 6"/>
+            <p:cNvPr id="7" name="Freeform 7"/>
             <p:cNvSpPr/>
             <p:nvPr/>
           </p:nvSpPr>
@@ -3921,7 +4001,7 @@
         </p:sp>
         <p:sp>
           <p:nvSpPr>
-            <p:cNvPr id="7" name="TextBox 7"/>
+            <p:cNvPr id="8" name="TextBox 8"/>
             <p:cNvSpPr txBox="1"/>
             <p:nvPr/>
           </p:nvSpPr>
@@ -3952,7 +4032,7 @@
       </p:grpSp>
       <p:grpSp>
         <p:nvGrpSpPr>
-          <p:cNvPr id="8" name="Group 8"/>
+          <p:cNvPr id="9" name="Group 9"/>
           <p:cNvGrpSpPr/>
           <p:nvPr/>
         </p:nvGrpSpPr>
@@ -3966,7 +4046,7 @@
         </p:grpSpPr>
         <p:sp>
           <p:nvSpPr>
-            <p:cNvPr id="9" name="Freeform 9"/>
+            <p:cNvPr id="10" name="Freeform 10"/>
             <p:cNvSpPr/>
             <p:nvPr/>
           </p:nvSpPr>
@@ -4003,10 +4083,10 @@
               </a:pathLst>
             </a:custGeom>
             <a:blipFill>
-              <a:blip r:embed="rId1">
+              <a:blip r:embed="rId2">
                 <a:extLst>
                   <a:ext uri="{96DAC541-7B7A-43D3-8B79-37D633B846F1}">
-                    <asvg:svgBlip xmlns:asvg="http://schemas.microsoft.com/office/drawing/2016/SVG/main" r:embed="rId2"/>
+                    <asvg:svgBlip xmlns:asvg="http://schemas.microsoft.com/office/drawing/2016/SVG/main" r:embed="rId3"/>
                   </a:ext>
                 </a:extLst>
               </a:blip>
@@ -4018,7 +4098,7 @@
         </p:sp>
         <p:sp>
           <p:nvSpPr>
-            <p:cNvPr id="10" name="Freeform 10"/>
+            <p:cNvPr id="11" name="Freeform 11"/>
             <p:cNvSpPr/>
             <p:nvPr/>
           </p:nvSpPr>
@@ -4055,7 +4135,7 @@
               </a:pathLst>
             </a:custGeom>
             <a:blipFill>
-              <a:blip r:embed="rId3"/>
+              <a:blip r:embed="rId4"/>
               <a:stretch>
                 <a:fillRect l="-18978" t="-102648" r="-23742" b="-133744"/>
               </a:stretch>
@@ -4064,7 +4144,7 @@
         </p:sp>
         <p:sp>
           <p:nvSpPr>
-            <p:cNvPr id="11" name="Freeform 11"/>
+            <p:cNvPr id="12" name="Freeform 12"/>
             <p:cNvSpPr/>
             <p:nvPr/>
           </p:nvSpPr>
@@ -4101,10 +4181,10 @@
               </a:pathLst>
             </a:custGeom>
             <a:blipFill>
-              <a:blip r:embed="rId4">
+              <a:blip r:embed="rId5">
                 <a:extLst>
                   <a:ext uri="{96DAC541-7B7A-43D3-8B79-37D633B846F1}">
-                    <asvg:svgBlip xmlns:asvg="http://schemas.microsoft.com/office/drawing/2016/SVG/main" r:embed="rId5"/>
+                    <asvg:svgBlip xmlns:asvg="http://schemas.microsoft.com/office/drawing/2016/SVG/main" r:embed="rId6"/>
                   </a:ext>
                 </a:extLst>
               </a:blip>
@@ -4116,7 +4196,7 @@
         </p:sp>
         <p:sp>
           <p:nvSpPr>
-            <p:cNvPr id="12" name="Freeform 12"/>
+            <p:cNvPr id="13" name="Freeform 13"/>
             <p:cNvSpPr/>
             <p:nvPr/>
           </p:nvSpPr>
@@ -4153,10 +4233,10 @@
               </a:pathLst>
             </a:custGeom>
             <a:blipFill>
-              <a:blip r:embed="rId6">
+              <a:blip r:embed="rId7">
                 <a:extLst>
                   <a:ext uri="{96DAC541-7B7A-43D3-8B79-37D633B846F1}">
-                    <asvg:svgBlip xmlns:asvg="http://schemas.microsoft.com/office/drawing/2016/SVG/main" r:embed="rId7"/>
+                    <asvg:svgBlip xmlns:asvg="http://schemas.microsoft.com/office/drawing/2016/SVG/main" r:embed="rId8"/>
                   </a:ext>
                 </a:extLst>
               </a:blip>
@@ -4168,7 +4248,7 @@
         </p:sp>
         <p:sp>
           <p:nvSpPr>
-            <p:cNvPr id="13" name="Freeform 13"/>
+            <p:cNvPr id="14" name="Freeform 14"/>
             <p:cNvSpPr/>
             <p:nvPr/>
           </p:nvSpPr>
@@ -4205,10 +4285,10 @@
               </a:pathLst>
             </a:custGeom>
             <a:blipFill>
-              <a:blip r:embed="rId8">
+              <a:blip r:embed="rId9">
                 <a:extLst>
                   <a:ext uri="{96DAC541-7B7A-43D3-8B79-37D633B846F1}">
-                    <asvg:svgBlip xmlns:asvg="http://schemas.microsoft.com/office/drawing/2016/SVG/main" r:embed="rId9"/>
+                    <asvg:svgBlip xmlns:asvg="http://schemas.microsoft.com/office/drawing/2016/SVG/main" r:embed="rId10"/>
                   </a:ext>
                 </a:extLst>
               </a:blip>
@@ -4220,7 +4300,7 @@
         </p:sp>
         <p:sp>
           <p:nvSpPr>
-            <p:cNvPr id="14" name="AutoShape 14"/>
+            <p:cNvPr id="15" name="AutoShape 15"/>
             <p:cNvSpPr/>
             <p:nvPr/>
           </p:nvSpPr>
@@ -4244,7 +4324,7 @@
         </p:sp>
         <p:sp>
           <p:nvSpPr>
-            <p:cNvPr id="15" name="AutoShape 15"/>
+            <p:cNvPr id="16" name="AutoShape 16"/>
             <p:cNvSpPr/>
             <p:nvPr/>
           </p:nvSpPr>
@@ -4269,7 +4349,7 @@
       </p:grpSp>
       <p:sp>
         <p:nvSpPr>
-          <p:cNvPr id="16" name="Freeform 16"/>
+          <p:cNvPr id="17" name="Freeform 17"/>
           <p:cNvSpPr/>
           <p:nvPr/>
         </p:nvSpPr>
@@ -4306,7 +4386,7 @@
             </a:pathLst>
           </a:custGeom>
           <a:blipFill>
-            <a:blip r:embed="rId10"/>
+            <a:blip r:embed="rId11"/>
             <a:stretch>
               <a:fillRect t="-342609" r="-22266" b="-333069"/>
             </a:stretch>
@@ -4315,7 +4395,7 @@
       </p:sp>
       <p:sp>
         <p:nvSpPr>
-          <p:cNvPr id="17" name="Freeform 17"/>
+          <p:cNvPr id="18" name="Freeform 18"/>
           <p:cNvSpPr/>
           <p:nvPr/>
         </p:nvSpPr>
@@ -4352,7 +4432,7 @@
             </a:pathLst>
           </a:custGeom>
           <a:blipFill>
-            <a:blip r:embed="rId11"/>
+            <a:blip r:embed="rId12"/>
             <a:stretch>
               <a:fillRect t="-45828" b="-29502"/>
             </a:stretch>
@@ -4361,7 +4441,7 @@
       </p:sp>
       <p:sp>
         <p:nvSpPr>
-          <p:cNvPr id="18" name="Freeform 18"/>
+          <p:cNvPr id="19" name="Freeform 19"/>
           <p:cNvSpPr/>
           <p:nvPr/>
         </p:nvSpPr>
@@ -4398,7 +4478,7 @@
             </a:pathLst>
           </a:custGeom>
           <a:blipFill>
-            <a:blip r:embed="rId12"/>
+            <a:blip r:embed="rId13"/>
             <a:stretch>
               <a:fillRect l="-8729" t="-42725" b="-42725"/>
             </a:stretch>
@@ -4407,7 +4487,7 @@
       </p:sp>
       <p:sp>
         <p:nvSpPr>
-          <p:cNvPr id="19" name="Freeform 19"/>
+          <p:cNvPr id="20" name="Freeform 20"/>
           <p:cNvSpPr/>
           <p:nvPr/>
         </p:nvSpPr>
@@ -4444,7 +4524,7 @@
             </a:pathLst>
           </a:custGeom>
           <a:blipFill>
-            <a:blip r:embed="rId13"/>
+            <a:blip r:embed="rId14"/>
             <a:stretch>
               <a:fillRect/>
             </a:stretch>
@@ -4453,7 +4533,7 @@
       </p:sp>
       <p:sp>
         <p:nvSpPr>
-          <p:cNvPr id="20" name="Freeform 20"/>
+          <p:cNvPr id="21" name="Freeform 21"/>
           <p:cNvSpPr/>
           <p:nvPr/>
         </p:nvSpPr>
@@ -4490,7 +4570,7 @@
             </a:pathLst>
           </a:custGeom>
           <a:blipFill>
-            <a:blip r:embed="rId14"/>
+            <a:blip r:embed="rId15"/>
             <a:stretch>
               <a:fillRect l="-7223" t="-4692" r="-7197" b="-38431"/>
             </a:stretch>
@@ -4499,7 +4579,7 @@
       </p:sp>
       <p:grpSp>
         <p:nvGrpSpPr>
-          <p:cNvPr id="21" name="Group 21"/>
+          <p:cNvPr id="22" name="Group 22"/>
           <p:cNvGrpSpPr/>
           <p:nvPr/>
         </p:nvGrpSpPr>
@@ -4513,7 +4593,7 @@
         </p:grpSpPr>
         <p:sp>
           <p:nvSpPr>
-            <p:cNvPr id="22" name="Freeform 22"/>
+            <p:cNvPr id="23" name="Freeform 23"/>
             <p:cNvSpPr/>
             <p:nvPr/>
           </p:nvSpPr>
@@ -4550,7 +4630,7 @@
               </a:pathLst>
             </a:custGeom>
             <a:blipFill>
-              <a:blip r:embed="rId15"/>
+              <a:blip r:embed="rId16"/>
               <a:stretch>
                 <a:fillRect t="-47772" r="-44513" b="-431558"/>
               </a:stretch>
@@ -4559,7 +4639,7 @@
         </p:sp>
         <p:sp>
           <p:nvSpPr>
-            <p:cNvPr id="23" name="Freeform 23"/>
+            <p:cNvPr id="24" name="Freeform 24"/>
             <p:cNvSpPr/>
             <p:nvPr/>
           </p:nvSpPr>
@@ -4596,7 +4676,7 @@
               </a:pathLst>
             </a:custGeom>
             <a:blipFill>
-              <a:blip r:embed="rId16"/>
+              <a:blip r:embed="rId17"/>
               <a:stretch>
                 <a:fillRect l="-268445" t="-197976" r="-50614" b="-207671"/>
               </a:stretch>
@@ -4606,7 +4686,7 @@
       </p:grpSp>
       <p:sp>
         <p:nvSpPr>
-          <p:cNvPr id="24" name="Freeform 24"/>
+          <p:cNvPr id="25" name="Freeform 25"/>
           <p:cNvSpPr/>
           <p:nvPr/>
         </p:nvSpPr>
@@ -4643,7 +4723,7 @@
             </a:pathLst>
           </a:custGeom>
           <a:blipFill>
-            <a:blip r:embed="rId17"/>
+            <a:blip r:embed="rId18"/>
             <a:stretch>
               <a:fillRect l="-17937" r="-18993" b="-27200"/>
             </a:stretch>
@@ -4652,7 +4732,7 @@
       </p:sp>
       <p:sp>
         <p:nvSpPr>
-          <p:cNvPr id="25" name="Freeform 25"/>
+          <p:cNvPr id="26" name="Freeform 26"/>
           <p:cNvSpPr/>
           <p:nvPr/>
         </p:nvSpPr>
@@ -4689,7 +4769,7 @@
             </a:pathLst>
           </a:custGeom>
           <a:blipFill>
-            <a:blip r:embed="rId18"/>
+            <a:blip r:embed="rId19"/>
             <a:stretch>
               <a:fillRect t="-67118" b="-54210"/>
             </a:stretch>
@@ -4741,9 +4821,55 @@
           <a:chExt cx="0" cy="0"/>
         </a:xfrm>
       </p:grpSpPr>
+      <p:sp>
+        <p:nvSpPr>
+          <p:cNvPr id="2" name="Freeform 2"/>
+          <p:cNvSpPr/>
+          <p:nvPr/>
+        </p:nvSpPr>
+        <p:spPr>
+          <a:xfrm>
+            <a:off x="0" y="0"/>
+            <a:ext cx="18288000" cy="10287000"/>
+          </a:xfrm>
+          <a:custGeom>
+            <a:avLst/>
+            <a:gdLst/>
+            <a:ahLst/>
+            <a:cxnLst/>
+            <a:rect l="l" t="t" r="r" b="b"/>
+            <a:pathLst>
+              <a:path w="18288000" h="10287000">
+                <a:moveTo>
+                  <a:pt x="0" y="0"/>
+                </a:moveTo>
+                <a:lnTo>
+                  <a:pt x="18288000" y="0"/>
+                </a:lnTo>
+                <a:lnTo>
+                  <a:pt x="18288000" y="10287000"/>
+                </a:lnTo>
+                <a:lnTo>
+                  <a:pt x="0" y="10287000"/>
+                </a:lnTo>
+                <a:lnTo>
+                  <a:pt x="0" y="0"/>
+                </a:lnTo>
+                <a:close/>
+              </a:path>
+            </a:pathLst>
+          </a:custGeom>
+          <a:blipFill>
+            <a:blip r:embed="rId1"/>
+            <a:stretch>
+              <a:fillRect l="-700" t="-10915" b="-8582"/>
+            </a:stretch>
+          </a:blipFill>
+        </p:spPr>
+      </p:sp>
       <p:grpSp>
         <p:nvGrpSpPr>
-          <p:cNvPr id="2" name="Group 2"/>
+          <p:cNvPr id="3" name="Group 3"/>
           <p:cNvGrpSpPr/>
           <p:nvPr/>
         </p:nvGrpSpPr>
@@ -4757,7 +4883,7 @@
         </p:grpSpPr>
         <p:sp>
           <p:nvSpPr>
-            <p:cNvPr id="3" name="Freeform 3"/>
+            <p:cNvPr id="4" name="Freeform 4"/>
             <p:cNvSpPr/>
             <p:nvPr/>
           </p:nvSpPr>
@@ -4837,7 +4963,7 @@
         </p:sp>
         <p:sp>
           <p:nvSpPr>
-            <p:cNvPr id="4" name="TextBox 4"/>
+            <p:cNvPr id="5" name="TextBox 5"/>
             <p:cNvSpPr txBox="1"/>
             <p:nvPr/>
           </p:nvSpPr>
@@ -4868,7 +4994,7 @@
       </p:grpSp>
       <p:grpSp>
         <p:nvGrpSpPr>
-          <p:cNvPr id="5" name="Group 5"/>
+          <p:cNvPr id="6" name="Group 6"/>
           <p:cNvGrpSpPr/>
           <p:nvPr/>
         </p:nvGrpSpPr>
@@ -4882,7 +5008,7 @@
         </p:grpSpPr>
         <p:sp>
           <p:nvSpPr>
-            <p:cNvPr id="6" name="Freeform 6"/>
+            <p:cNvPr id="7" name="Freeform 7"/>
             <p:cNvSpPr/>
             <p:nvPr/>
           </p:nvSpPr>
@@ -4962,7 +5088,7 @@
         </p:sp>
         <p:sp>
           <p:nvSpPr>
-            <p:cNvPr id="7" name="TextBox 7"/>
+            <p:cNvPr id="8" name="TextBox 8"/>
             <p:cNvSpPr txBox="1"/>
             <p:nvPr/>
           </p:nvSpPr>
@@ -4993,7 +5119,7 @@
       </p:grpSp>
       <p:grpSp>
         <p:nvGrpSpPr>
-          <p:cNvPr id="8" name="Group 8"/>
+          <p:cNvPr id="9" name="Group 9"/>
           <p:cNvGrpSpPr/>
           <p:nvPr/>
         </p:nvGrpSpPr>
@@ -5007,7 +5133,7 @@
         </p:grpSpPr>
         <p:sp>
           <p:nvSpPr>
-            <p:cNvPr id="9" name="Freeform 9"/>
+            <p:cNvPr id="10" name="Freeform 10"/>
             <p:cNvSpPr/>
             <p:nvPr/>
           </p:nvSpPr>
@@ -5077,7 +5203,7 @@
         </p:sp>
         <p:sp>
           <p:nvSpPr>
-            <p:cNvPr id="10" name="TextBox 10"/>
+            <p:cNvPr id="11" name="TextBox 11"/>
             <p:cNvSpPr txBox="1"/>
             <p:nvPr/>
           </p:nvSpPr>
@@ -5108,7 +5234,7 @@
       </p:grpSp>
       <p:grpSp>
         <p:nvGrpSpPr>
-          <p:cNvPr id="11" name="Group 11"/>
+          <p:cNvPr id="12" name="Group 12"/>
           <p:cNvGrpSpPr/>
           <p:nvPr/>
         </p:nvGrpSpPr>
@@ -5122,7 +5248,7 @@
         </p:grpSpPr>
         <p:sp>
           <p:nvSpPr>
-            <p:cNvPr id="12" name="Freeform 12"/>
+            <p:cNvPr id="13" name="Freeform 13"/>
             <p:cNvSpPr/>
             <p:nvPr/>
           </p:nvSpPr>
@@ -5207,7 +5333,7 @@
         </p:sp>
         <p:sp>
           <p:nvSpPr>
-            <p:cNvPr id="13" name="TextBox 13"/>
+            <p:cNvPr id="14" name="TextBox 14"/>
             <p:cNvSpPr txBox="1"/>
             <p:nvPr/>
           </p:nvSpPr>
@@ -5238,7 +5364,7 @@
       </p:grpSp>
       <p:grpSp>
         <p:nvGrpSpPr>
-          <p:cNvPr id="14" name="Group 14"/>
+          <p:cNvPr id="15" name="Group 15"/>
           <p:cNvGrpSpPr/>
           <p:nvPr/>
         </p:nvGrpSpPr>
@@ -5252,7 +5378,7 @@
         </p:grpSpPr>
         <p:sp>
           <p:nvSpPr>
-            <p:cNvPr id="15" name="Freeform 15"/>
+            <p:cNvPr id="16" name="Freeform 16"/>
             <p:cNvSpPr/>
             <p:nvPr/>
           </p:nvSpPr>
@@ -5322,7 +5448,7 @@
         </p:sp>
         <p:sp>
           <p:nvSpPr>
-            <p:cNvPr id="16" name="TextBox 16"/>
+            <p:cNvPr id="17" name="TextBox 17"/>
             <p:cNvSpPr txBox="1"/>
             <p:nvPr/>
           </p:nvSpPr>
@@ -5353,7 +5479,7 @@
       </p:grpSp>
       <p:grpSp>
         <p:nvGrpSpPr>
-          <p:cNvPr id="17" name="Group 17"/>
+          <p:cNvPr id="18" name="Group 18"/>
           <p:cNvGrpSpPr/>
           <p:nvPr/>
         </p:nvGrpSpPr>
@@ -5367,7 +5493,7 @@
         </p:grpSpPr>
         <p:grpSp>
           <p:nvGrpSpPr>
-            <p:cNvPr id="18" name="Group 18"/>
+            <p:cNvPr id="19" name="Group 19"/>
             <p:cNvGrpSpPr/>
             <p:nvPr/>
           </p:nvGrpSpPr>
@@ -5381,7 +5507,7 @@
           </p:grpSpPr>
           <p:sp>
             <p:nvSpPr>
-              <p:cNvPr id="19" name="Freeform 19"/>
+              <p:cNvPr id="20" name="Freeform 20"/>
               <p:cNvSpPr/>
               <p:nvPr/>
             </p:nvSpPr>
@@ -5466,7 +5592,7 @@
           </p:sp>
           <p:sp>
             <p:nvSpPr>
-              <p:cNvPr id="20" name="TextBox 20"/>
+              <p:cNvPr id="21" name="TextBox 21"/>
               <p:cNvSpPr txBox="1"/>
               <p:nvPr/>
             </p:nvSpPr>
@@ -5497,21 +5623,21 @@
         </p:grpSp>
         <p:sp>
           <p:nvSpPr>
-            <p:cNvPr id="21" name="TextBox 21"/>
+            <p:cNvPr id="22" name="TextBox 22"/>
             <p:cNvSpPr txBox="1"/>
             <p:nvPr/>
           </p:nvSpPr>
           <p:spPr>
             <a:xfrm>
-              <a:off x="1879958" y="411945"/>
-              <a:ext cx="7274520" cy="484294"/>
+              <a:off x="1577340" y="412327"/>
+              <a:ext cx="8037406" cy="526627"/>
             </a:xfrm>
             <a:prstGeom prst="rect">
               <a:avLst/>
             </a:prstGeom>
           </p:spPr>
           <p:txBody>
-            <a:bodyPr lIns="0" tIns="0" rIns="0" bIns="0" rtlCol="0" anchor="t">
+            <a:bodyPr wrap="square" lIns="0" tIns="0" rIns="0" bIns="0" rtlCol="0" anchor="t">
               <a:spAutoFit/>
             </a:bodyPr>
             <a:lstStyle/>
@@ -5551,7 +5677,7 @@
       </p:grpSp>
       <p:sp>
         <p:nvSpPr>
-          <p:cNvPr id="22" name="Freeform 22"/>
+          <p:cNvPr id="23" name="Freeform 23"/>
           <p:cNvSpPr/>
           <p:nvPr/>
         </p:nvSpPr>
@@ -5588,7 +5714,7 @@
             </a:pathLst>
           </a:custGeom>
           <a:blipFill>
-            <a:blip r:embed="rId1"/>
+            <a:blip r:embed="rId2"/>
             <a:stretch>
               <a:fillRect l="-17937" r="-18993" b="-27200"/>
             </a:stretch>
@@ -5597,7 +5723,7 @@
       </p:sp>
       <p:sp>
         <p:nvSpPr>
-          <p:cNvPr id="23" name="Freeform 23"/>
+          <p:cNvPr id="24" name="Freeform 24"/>
           <p:cNvSpPr/>
           <p:nvPr/>
         </p:nvSpPr>
@@ -5634,7 +5760,7 @@
             </a:pathLst>
           </a:custGeom>
           <a:blipFill>
-            <a:blip r:embed="rId2"/>
+            <a:blip r:embed="rId3"/>
             <a:stretch>
               <a:fillRect t="-35476" b="-43946"/>
             </a:stretch>
@@ -5643,21 +5769,21 @@
       </p:sp>
       <p:sp>
         <p:nvSpPr>
-          <p:cNvPr id="24" name="TextBox 24"/>
+          <p:cNvPr id="25" name="TextBox 25"/>
           <p:cNvSpPr txBox="1"/>
           <p:nvPr/>
         </p:nvSpPr>
         <p:spPr>
           <a:xfrm>
-            <a:off x="6248400" y="721995"/>
-            <a:ext cx="6084570" cy="717550"/>
+            <a:off x="6450390" y="725405"/>
+            <a:ext cx="5738664" cy="679450"/>
           </a:xfrm>
           <a:prstGeom prst="rect">
             <a:avLst/>
           </a:prstGeom>
         </p:spPr>
         <p:txBody>
-          <a:bodyPr wrap="square" lIns="0" tIns="0" rIns="0" bIns="0" rtlCol="0" anchor="t">
+          <a:bodyPr lIns="0" tIns="0" rIns="0" bIns="0" rtlCol="0" anchor="t">
             <a:spAutoFit/>
           </a:bodyPr>
           <a:lstStyle/>
@@ -5693,21 +5819,21 @@
       </p:sp>
       <p:sp>
         <p:nvSpPr>
-          <p:cNvPr id="25" name="TextBox 25"/>
+          <p:cNvPr id="26" name="TextBox 26"/>
           <p:cNvSpPr txBox="1"/>
           <p:nvPr/>
         </p:nvSpPr>
         <p:spPr>
           <a:xfrm>
-            <a:off x="1884383" y="2243722"/>
-            <a:ext cx="1495127" cy="372745"/>
+            <a:off x="1793240" y="2243455"/>
+            <a:ext cx="1586865" cy="394970"/>
           </a:xfrm>
           <a:prstGeom prst="rect">
             <a:avLst/>
           </a:prstGeom>
         </p:spPr>
         <p:txBody>
-          <a:bodyPr lIns="0" tIns="0" rIns="0" bIns="0" rtlCol="0" anchor="t">
+          <a:bodyPr wrap="square" lIns="0" tIns="0" rIns="0" bIns="0" rtlCol="0" anchor="t">
             <a:spAutoFit/>
           </a:bodyPr>
           <a:lstStyle/>
@@ -5746,7 +5872,7 @@
       </p:sp>
       <p:sp>
         <p:nvSpPr>
-          <p:cNvPr id="26" name="TextBox 26"/>
+          <p:cNvPr id="27" name="TextBox 27"/>
           <p:cNvSpPr txBox="1"/>
           <p:nvPr/>
         </p:nvSpPr>
@@ -5799,21 +5925,21 @@
       </p:sp>
       <p:sp>
         <p:nvSpPr>
-          <p:cNvPr id="27" name="TextBox 27"/>
+          <p:cNvPr id="28" name="TextBox 28"/>
           <p:cNvSpPr txBox="1"/>
           <p:nvPr/>
         </p:nvSpPr>
         <p:spPr>
           <a:xfrm>
-            <a:off x="2359459" y="6381732"/>
-            <a:ext cx="962620" cy="372745"/>
+            <a:off x="2302510" y="6381750"/>
+            <a:ext cx="1019810" cy="394970"/>
           </a:xfrm>
           <a:prstGeom prst="rect">
             <a:avLst/>
           </a:prstGeom>
         </p:spPr>
         <p:txBody>
-          <a:bodyPr lIns="0" tIns="0" rIns="0" bIns="0" rtlCol="0" anchor="t">
+          <a:bodyPr wrap="square" lIns="0" tIns="0" rIns="0" bIns="0" rtlCol="0" anchor="t">
             <a:spAutoFit/>
           </a:bodyPr>
           <a:lstStyle/>
@@ -5852,7 +5978,7 @@
       </p:sp>
       <p:sp>
         <p:nvSpPr>
-          <p:cNvPr id="28" name="TextBox 28"/>
+          <p:cNvPr id="29" name="TextBox 29"/>
           <p:cNvSpPr txBox="1"/>
           <p:nvPr/>
         </p:nvSpPr>
@@ -5905,21 +6031,21 @@
       </p:sp>
       <p:sp>
         <p:nvSpPr>
-          <p:cNvPr id="29" name="TextBox 29"/>
+          <p:cNvPr id="30" name="TextBox 30"/>
           <p:cNvSpPr txBox="1"/>
           <p:nvPr/>
         </p:nvSpPr>
         <p:spPr>
           <a:xfrm>
-            <a:off x="12295438" y="6392417"/>
-            <a:ext cx="2931170" cy="372745"/>
+            <a:off x="12188825" y="6427470"/>
+            <a:ext cx="3341370" cy="394970"/>
           </a:xfrm>
           <a:prstGeom prst="rect">
             <a:avLst/>
           </a:prstGeom>
         </p:spPr>
         <p:txBody>
-          <a:bodyPr lIns="0" tIns="0" rIns="0" bIns="0" rtlCol="0" anchor="t">
+          <a:bodyPr wrap="square" lIns="0" tIns="0" rIns="0" bIns="0" rtlCol="0" anchor="t">
             <a:spAutoFit/>
           </a:bodyPr>
           <a:lstStyle/>
@@ -6001,9 +6127,55 @@
           <a:chExt cx="0" cy="0"/>
         </a:xfrm>
       </p:grpSpPr>
+      <p:sp>
+        <p:nvSpPr>
+          <p:cNvPr id="2" name="Freeform 2"/>
+          <p:cNvSpPr/>
+          <p:nvPr/>
+        </p:nvSpPr>
+        <p:spPr>
+          <a:xfrm>
+            <a:off x="0" y="0"/>
+            <a:ext cx="18288000" cy="10287000"/>
+          </a:xfrm>
+          <a:custGeom>
+            <a:avLst/>
+            <a:gdLst/>
+            <a:ahLst/>
+            <a:cxnLst/>
+            <a:rect l="l" t="t" r="r" b="b"/>
+            <a:pathLst>
+              <a:path w="18288000" h="10287000">
+                <a:moveTo>
+                  <a:pt x="0" y="0"/>
+                </a:moveTo>
+                <a:lnTo>
+                  <a:pt x="18288000" y="0"/>
+                </a:lnTo>
+                <a:lnTo>
+                  <a:pt x="18288000" y="10287000"/>
+                </a:lnTo>
+                <a:lnTo>
+                  <a:pt x="0" y="10287000"/>
+                </a:lnTo>
+                <a:lnTo>
+                  <a:pt x="0" y="0"/>
+                </a:lnTo>
+                <a:close/>
+              </a:path>
+            </a:pathLst>
+          </a:custGeom>
+          <a:blipFill>
+            <a:blip r:embed="rId1"/>
+            <a:stretch>
+              <a:fillRect l="-700" t="-10915" b="-8582"/>
+            </a:stretch>
+          </a:blipFill>
+        </p:spPr>
+      </p:sp>
       <p:grpSp>
         <p:nvGrpSpPr>
-          <p:cNvPr id="2" name="Group 2"/>
+          <p:cNvPr id="3" name="Group 3"/>
           <p:cNvGrpSpPr/>
           <p:nvPr/>
         </p:nvGrpSpPr>
@@ -6017,7 +6189,7 @@
         </p:grpSpPr>
         <p:sp>
           <p:nvSpPr>
-            <p:cNvPr id="3" name="Freeform 3"/>
+            <p:cNvPr id="4" name="Freeform 4"/>
             <p:cNvSpPr/>
             <p:nvPr/>
           </p:nvSpPr>
@@ -6080,7 +6252,7 @@
         </p:sp>
         <p:sp>
           <p:nvSpPr>
-            <p:cNvPr id="4" name="TextBox 4"/>
+            <p:cNvPr id="5" name="TextBox 5"/>
             <p:cNvSpPr txBox="1"/>
             <p:nvPr/>
           </p:nvSpPr>
@@ -6111,14 +6283,14 @@
       </p:grpSp>
       <p:sp>
         <p:nvSpPr>
-          <p:cNvPr id="5" name="TextBox 5"/>
+          <p:cNvPr id="6" name="TextBox 6"/>
           <p:cNvSpPr txBox="1"/>
           <p:nvPr/>
         </p:nvSpPr>
         <p:spPr>
           <a:xfrm>
-            <a:off x="6477000" y="647700"/>
-            <a:ext cx="5492750" cy="717550"/>
+            <a:off x="6248400" y="800100"/>
+            <a:ext cx="5240020" cy="717550"/>
           </a:xfrm>
           <a:prstGeom prst="rect">
             <a:avLst/>
@@ -6161,7 +6333,7 @@
       </p:sp>
       <p:sp>
         <p:nvSpPr>
-          <p:cNvPr id="6" name="Freeform 6"/>
+          <p:cNvPr id="7" name="Freeform 7"/>
           <p:cNvSpPr/>
           <p:nvPr/>
         </p:nvSpPr>
@@ -6198,7 +6370,7 @@
             </a:pathLst>
           </a:custGeom>
           <a:blipFill>
-            <a:blip r:embed="rId1"/>
+            <a:blip r:embed="rId2"/>
             <a:stretch>
               <a:fillRect l="-17937" r="-18993" b="-27200"/>
             </a:stretch>
@@ -6207,7 +6379,7 @@
       </p:sp>
       <p:sp>
         <p:nvSpPr>
-          <p:cNvPr id="7" name="Freeform 7"/>
+          <p:cNvPr id="8" name="Freeform 8"/>
           <p:cNvSpPr/>
           <p:nvPr/>
         </p:nvSpPr>
@@ -6244,7 +6416,7 @@
             </a:pathLst>
           </a:custGeom>
           <a:blipFill>
-            <a:blip r:embed="rId2"/>
+            <a:blip r:embed="rId3"/>
             <a:stretch>
               <a:fillRect t="-35476" b="-43946"/>
             </a:stretch>
@@ -6296,9 +6468,55 @@
           <a:chExt cx="0" cy="0"/>
         </a:xfrm>
       </p:grpSpPr>
+      <p:sp>
+        <p:nvSpPr>
+          <p:cNvPr id="2" name="Freeform 2"/>
+          <p:cNvSpPr/>
+          <p:nvPr/>
+        </p:nvSpPr>
+        <p:spPr>
+          <a:xfrm>
+            <a:off x="0" y="0"/>
+            <a:ext cx="18288000" cy="10287000"/>
+          </a:xfrm>
+          <a:custGeom>
+            <a:avLst/>
+            <a:gdLst/>
+            <a:ahLst/>
+            <a:cxnLst/>
+            <a:rect l="l" t="t" r="r" b="b"/>
+            <a:pathLst>
+              <a:path w="18288000" h="10287000">
+                <a:moveTo>
+                  <a:pt x="0" y="0"/>
+                </a:moveTo>
+                <a:lnTo>
+                  <a:pt x="18288000" y="0"/>
+                </a:lnTo>
+                <a:lnTo>
+                  <a:pt x="18288000" y="10287000"/>
+                </a:lnTo>
+                <a:lnTo>
+                  <a:pt x="0" y="10287000"/>
+                </a:lnTo>
+                <a:lnTo>
+                  <a:pt x="0" y="0"/>
+                </a:lnTo>
+                <a:close/>
+              </a:path>
+            </a:pathLst>
+          </a:custGeom>
+          <a:blipFill>
+            <a:blip r:embed="rId1"/>
+            <a:stretch>
+              <a:fillRect l="-700" t="-10915" b="-8582"/>
+            </a:stretch>
+          </a:blipFill>
+        </p:spPr>
+      </p:sp>
       <p:grpSp>
         <p:nvGrpSpPr>
-          <p:cNvPr id="2" name="Group 2"/>
+          <p:cNvPr id="3" name="Group 3"/>
           <p:cNvGrpSpPr/>
           <p:nvPr/>
         </p:nvGrpSpPr>
@@ -6312,7 +6530,7 @@
         </p:grpSpPr>
         <p:sp>
           <p:nvSpPr>
-            <p:cNvPr id="3" name="Freeform 3"/>
+            <p:cNvPr id="4" name="Freeform 4"/>
             <p:cNvSpPr/>
             <p:nvPr/>
           </p:nvSpPr>
@@ -6380,7 +6598,7 @@
         </p:sp>
         <p:sp>
           <p:nvSpPr>
-            <p:cNvPr id="4" name="TextBox 4"/>
+            <p:cNvPr id="5" name="TextBox 5"/>
             <p:cNvSpPr txBox="1"/>
             <p:nvPr/>
           </p:nvSpPr>
@@ -6411,14 +6629,14 @@
       </p:grpSp>
       <p:sp>
         <p:nvSpPr>
-          <p:cNvPr id="5" name="TextBox 5"/>
+          <p:cNvPr id="6" name="TextBox 6"/>
           <p:cNvSpPr txBox="1"/>
           <p:nvPr/>
         </p:nvSpPr>
         <p:spPr>
           <a:xfrm>
-            <a:off x="6705600" y="650875"/>
-            <a:ext cx="5225415" cy="717550"/>
+            <a:off x="6629400" y="650875"/>
+            <a:ext cx="5507990" cy="717550"/>
           </a:xfrm>
           <a:prstGeom prst="rect">
             <a:avLst/>
@@ -6461,7 +6679,7 @@
       </p:sp>
       <p:sp>
         <p:nvSpPr>
-          <p:cNvPr id="6" name="Freeform 6"/>
+          <p:cNvPr id="7" name="Freeform 7"/>
           <p:cNvSpPr/>
           <p:nvPr/>
         </p:nvSpPr>
@@ -6498,7 +6716,7 @@
             </a:pathLst>
           </a:custGeom>
           <a:blipFill>
-            <a:blip r:embed="rId1"/>
+            <a:blip r:embed="rId2"/>
             <a:stretch>
               <a:fillRect l="-17937" r="-18993" b="-27200"/>
             </a:stretch>
@@ -6507,7 +6725,7 @@
       </p:sp>
       <p:sp>
         <p:nvSpPr>
-          <p:cNvPr id="7" name="Freeform 7"/>
+          <p:cNvPr id="8" name="Freeform 8"/>
           <p:cNvSpPr/>
           <p:nvPr/>
         </p:nvSpPr>
@@ -6544,7 +6762,7 @@
             </a:pathLst>
           </a:custGeom>
           <a:blipFill>
-            <a:blip r:embed="rId2"/>
+            <a:blip r:embed="rId3"/>
             <a:stretch>
               <a:fillRect t="-35476" b="-43946"/>
             </a:stretch>
@@ -6596,9 +6814,55 @@
           <a:chExt cx="0" cy="0"/>
         </a:xfrm>
       </p:grpSpPr>
+      <p:sp>
+        <p:nvSpPr>
+          <p:cNvPr id="2" name="Freeform 2"/>
+          <p:cNvSpPr/>
+          <p:nvPr/>
+        </p:nvSpPr>
+        <p:spPr>
+          <a:xfrm>
+            <a:off x="0" y="0"/>
+            <a:ext cx="18288000" cy="10287000"/>
+          </a:xfrm>
+          <a:custGeom>
+            <a:avLst/>
+            <a:gdLst/>
+            <a:ahLst/>
+            <a:cxnLst/>
+            <a:rect l="l" t="t" r="r" b="b"/>
+            <a:pathLst>
+              <a:path w="18288000" h="10287000">
+                <a:moveTo>
+                  <a:pt x="0" y="0"/>
+                </a:moveTo>
+                <a:lnTo>
+                  <a:pt x="18288000" y="0"/>
+                </a:lnTo>
+                <a:lnTo>
+                  <a:pt x="18288000" y="10287000"/>
+                </a:lnTo>
+                <a:lnTo>
+                  <a:pt x="0" y="10287000"/>
+                </a:lnTo>
+                <a:lnTo>
+                  <a:pt x="0" y="0"/>
+                </a:lnTo>
+                <a:close/>
+              </a:path>
+            </a:pathLst>
+          </a:custGeom>
+          <a:blipFill>
+            <a:blip r:embed="rId1"/>
+            <a:stretch>
+              <a:fillRect l="-700" t="-10915" b="-8582"/>
+            </a:stretch>
+          </a:blipFill>
+        </p:spPr>
+      </p:sp>
       <p:grpSp>
         <p:nvGrpSpPr>
-          <p:cNvPr id="2" name="Group 2"/>
+          <p:cNvPr id="3" name="Group 3"/>
           <p:cNvGrpSpPr/>
           <p:nvPr/>
         </p:nvGrpSpPr>
@@ -6612,7 +6876,7 @@
         </p:grpSpPr>
         <p:sp>
           <p:nvSpPr>
-            <p:cNvPr id="3" name="Freeform 3"/>
+            <p:cNvPr id="4" name="Freeform 4"/>
             <p:cNvSpPr/>
             <p:nvPr/>
           </p:nvSpPr>
@@ -6675,7 +6939,7 @@
         </p:sp>
         <p:sp>
           <p:nvSpPr>
-            <p:cNvPr id="4" name="TextBox 4"/>
+            <p:cNvPr id="5" name="TextBox 5"/>
             <p:cNvSpPr txBox="1"/>
             <p:nvPr/>
           </p:nvSpPr>
@@ -6706,7 +6970,7 @@
       </p:grpSp>
       <p:sp>
         <p:nvSpPr>
-          <p:cNvPr id="5" name="TextBox 5"/>
+          <p:cNvPr id="6" name="TextBox 6"/>
           <p:cNvSpPr txBox="1"/>
           <p:nvPr/>
         </p:nvSpPr>
@@ -6756,7 +7020,7 @@
       </p:sp>
       <p:sp>
         <p:nvSpPr>
-          <p:cNvPr id="6" name="Freeform 6"/>
+          <p:cNvPr id="7" name="Freeform 7"/>
           <p:cNvSpPr/>
           <p:nvPr/>
         </p:nvSpPr>
@@ -6793,7 +7057,7 @@
             </a:pathLst>
           </a:custGeom>
           <a:blipFill>
-            <a:blip r:embed="rId1"/>
+            <a:blip r:embed="rId2"/>
             <a:stretch>
               <a:fillRect l="-17937" r="-18993" b="-27200"/>
             </a:stretch>
@@ -6802,7 +7066,7 @@
       </p:sp>
       <p:sp>
         <p:nvSpPr>
-          <p:cNvPr id="7" name="Freeform 7"/>
+          <p:cNvPr id="8" name="Freeform 8"/>
           <p:cNvSpPr/>
           <p:nvPr/>
         </p:nvSpPr>
@@ -6839,7 +7103,7 @@
             </a:pathLst>
           </a:custGeom>
           <a:blipFill>
-            <a:blip r:embed="rId2"/>
+            <a:blip r:embed="rId3"/>
             <a:stretch>
               <a:fillRect t="-35476" b="-43946"/>
             </a:stretch>
@@ -6893,14 +7157,60 @@
       </p:grpSpPr>
       <p:sp>
         <p:nvSpPr>
-          <p:cNvPr id="2" name="TextBox 2"/>
+          <p:cNvPr id="2" name="Freeform 2"/>
+          <p:cNvSpPr/>
+          <p:nvPr/>
+        </p:nvSpPr>
+        <p:spPr>
+          <a:xfrm>
+            <a:off x="0" y="0"/>
+            <a:ext cx="18288000" cy="10287000"/>
+          </a:xfrm>
+          <a:custGeom>
+            <a:avLst/>
+            <a:gdLst/>
+            <a:ahLst/>
+            <a:cxnLst/>
+            <a:rect l="l" t="t" r="r" b="b"/>
+            <a:pathLst>
+              <a:path w="18288000" h="10287000">
+                <a:moveTo>
+                  <a:pt x="0" y="0"/>
+                </a:moveTo>
+                <a:lnTo>
+                  <a:pt x="18288000" y="0"/>
+                </a:lnTo>
+                <a:lnTo>
+                  <a:pt x="18288000" y="10287000"/>
+                </a:lnTo>
+                <a:lnTo>
+                  <a:pt x="0" y="10287000"/>
+                </a:lnTo>
+                <a:lnTo>
+                  <a:pt x="0" y="0"/>
+                </a:lnTo>
+                <a:close/>
+              </a:path>
+            </a:pathLst>
+          </a:custGeom>
+          <a:blipFill>
+            <a:blip r:embed="rId1"/>
+            <a:stretch>
+              <a:fillRect l="-700" t="-10915" b="-8582"/>
+            </a:stretch>
+          </a:blipFill>
+        </p:spPr>
+      </p:sp>
+      <p:sp>
+        <p:nvSpPr>
+          <p:cNvPr id="3" name="TextBox 3"/>
           <p:cNvSpPr txBox="1"/>
           <p:nvPr/>
         </p:nvSpPr>
         <p:spPr>
           <a:xfrm>
-            <a:off x="6629400" y="694690"/>
-            <a:ext cx="5479415" cy="717550"/>
+            <a:off x="6400800" y="694690"/>
+            <a:ext cx="5417185" cy="717550"/>
           </a:xfrm>
           <a:prstGeom prst="rect">
             <a:avLst/>
@@ -6940,6 +7250,297 @@
             </a:endParaRPr>
           </a:p>
         </p:txBody>
+      </p:sp>
+      <p:grpSp>
+        <p:nvGrpSpPr>
+          <p:cNvPr id="4" name="Group 4"/>
+          <p:cNvGrpSpPr/>
+          <p:nvPr/>
+        </p:nvGrpSpPr>
+        <p:grpSpPr>
+          <a:xfrm rot="0">
+            <a:off x="601329" y="1850545"/>
+            <a:ext cx="17053525" cy="7747211"/>
+            <a:chOff x="0" y="0"/>
+            <a:chExt cx="4491463" cy="2040418"/>
+          </a:xfrm>
+        </p:grpSpPr>
+        <p:sp>
+          <p:nvSpPr>
+            <p:cNvPr id="5" name="Freeform 5"/>
+            <p:cNvSpPr/>
+            <p:nvPr/>
+          </p:nvSpPr>
+          <p:spPr>
+            <a:xfrm>
+              <a:off x="0" y="0"/>
+              <a:ext cx="4491463" cy="2040418"/>
+            </a:xfrm>
+            <a:custGeom>
+              <a:avLst/>
+              <a:gdLst/>
+              <a:ahLst/>
+              <a:cxnLst/>
+              <a:rect l="l" t="t" r="r" b="b"/>
+              <a:pathLst>
+                <a:path w="4491463" h="2040418">
+                  <a:moveTo>
+                    <a:pt x="7718" y="0"/>
+                  </a:moveTo>
+                  <a:lnTo>
+                    <a:pt x="4483746" y="0"/>
+                  </a:lnTo>
+                  <a:cubicBezTo>
+                    <a:pt x="4488008" y="0"/>
+                    <a:pt x="4491463" y="3455"/>
+                    <a:pt x="4491463" y="7718"/>
+                  </a:cubicBezTo>
+                  <a:lnTo>
+                    <a:pt x="4491463" y="2032700"/>
+                  </a:lnTo>
+                  <a:cubicBezTo>
+                    <a:pt x="4491463" y="2036962"/>
+                    <a:pt x="4488008" y="2040418"/>
+                    <a:pt x="4483746" y="2040418"/>
+                  </a:cubicBezTo>
+                  <a:lnTo>
+                    <a:pt x="7718" y="2040418"/>
+                  </a:lnTo>
+                  <a:cubicBezTo>
+                    <a:pt x="3455" y="2040418"/>
+                    <a:pt x="0" y="2036962"/>
+                    <a:pt x="0" y="2032700"/>
+                  </a:cubicBezTo>
+                  <a:lnTo>
+                    <a:pt x="0" y="7718"/>
+                  </a:lnTo>
+                  <a:cubicBezTo>
+                    <a:pt x="0" y="3455"/>
+                    <a:pt x="3455" y="0"/>
+                    <a:pt x="7718" y="0"/>
+                  </a:cubicBezTo>
+                  <a:close/>
+                </a:path>
+              </a:pathLst>
+            </a:custGeom>
+            <a:solidFill>
+              <a:srgbClr val="FFFFFF"/>
+            </a:solidFill>
+          </p:spPr>
+        </p:sp>
+        <p:sp>
+          <p:nvSpPr>
+            <p:cNvPr id="6" name="TextBox 6"/>
+            <p:cNvSpPr txBox="1"/>
+            <p:nvPr/>
+          </p:nvSpPr>
+          <p:spPr>
+            <a:xfrm>
+              <a:off x="0" y="-38100"/>
+              <a:ext cx="4491463" cy="2078518"/>
+            </a:xfrm>
+            <a:prstGeom prst="rect">
+              <a:avLst/>
+            </a:prstGeom>
+          </p:spPr>
+          <p:txBody>
+            <a:bodyPr lIns="50800" tIns="50800" rIns="50800" bIns="50800" rtlCol="0" anchor="ctr"/>
+            <a:lstStyle/>
+            <a:p>
+              <a:pPr algn="ctr">
+                <a:lnSpc>
+                  <a:spcPts val="2660"/>
+                </a:lnSpc>
+                <a:spcBef>
+                  <a:spcPct val="0"/>
+                </a:spcBef>
+              </a:pPr>
+            </a:p>
+          </p:txBody>
+        </p:sp>
+      </p:grpSp>
+      <p:sp>
+        <p:nvSpPr>
+          <p:cNvPr id="7" name="Freeform 7"/>
+          <p:cNvSpPr/>
+          <p:nvPr/>
+        </p:nvSpPr>
+        <p:spPr>
+          <a:xfrm>
+            <a:off x="15688714" y="251678"/>
+            <a:ext cx="2032692" cy="1458795"/>
+          </a:xfrm>
+          <a:custGeom>
+            <a:avLst/>
+            <a:gdLst/>
+            <a:ahLst/>
+            <a:cxnLst/>
+            <a:rect l="l" t="t" r="r" b="b"/>
+            <a:pathLst>
+              <a:path w="2032692" h="1458795">
+                <a:moveTo>
+                  <a:pt x="0" y="0"/>
+                </a:moveTo>
+                <a:lnTo>
+                  <a:pt x="2032691" y="0"/>
+                </a:lnTo>
+                <a:lnTo>
+                  <a:pt x="2032691" y="1458794"/>
+                </a:lnTo>
+                <a:lnTo>
+                  <a:pt x="0" y="1458794"/>
+                </a:lnTo>
+                <a:lnTo>
+                  <a:pt x="0" y="0"/>
+                </a:lnTo>
+                <a:close/>
+              </a:path>
+            </a:pathLst>
+          </a:custGeom>
+          <a:blipFill>
+            <a:blip r:embed="rId2"/>
+            <a:stretch>
+              <a:fillRect l="-17937" r="-18993" b="-27200"/>
+            </a:stretch>
+          </a:blipFill>
+        </p:spPr>
+      </p:sp>
+      <p:sp>
+        <p:nvSpPr>
+          <p:cNvPr id="8" name="Freeform 8"/>
+          <p:cNvSpPr/>
+          <p:nvPr/>
+        </p:nvSpPr>
+        <p:spPr>
+          <a:xfrm>
+            <a:off x="695939" y="301427"/>
+            <a:ext cx="3658330" cy="1359295"/>
+          </a:xfrm>
+          <a:custGeom>
+            <a:avLst/>
+            <a:gdLst/>
+            <a:ahLst/>
+            <a:cxnLst/>
+            <a:rect l="l" t="t" r="r" b="b"/>
+            <a:pathLst>
+              <a:path w="3658330" h="1359295">
+                <a:moveTo>
+                  <a:pt x="0" y="0"/>
+                </a:moveTo>
+                <a:lnTo>
+                  <a:pt x="3658331" y="0"/>
+                </a:lnTo>
+                <a:lnTo>
+                  <a:pt x="3658331" y="1359296"/>
+                </a:lnTo>
+                <a:lnTo>
+                  <a:pt x="0" y="1359296"/>
+                </a:lnTo>
+                <a:lnTo>
+                  <a:pt x="0" y="0"/>
+                </a:lnTo>
+                <a:close/>
+              </a:path>
+            </a:pathLst>
+          </a:custGeom>
+          <a:blipFill>
+            <a:blip r:embed="rId3"/>
+            <a:stretch>
+              <a:fillRect t="-35476" b="-43946"/>
+            </a:stretch>
+          </a:blipFill>
+        </p:spPr>
+      </p:sp>
+    </p:spTree>
+  </p:cSld>
+  <p:clrMapOvr>
+    <a:masterClrMapping/>
+  </p:clrMapOvr>
+</p:sld>
+</file>
+
+<file path=ppt/slides/slide7.xml><?xml version="1.0" encoding="utf-8"?>
+<p:sld xmlns:a="http://schemas.openxmlformats.org/drawingml/2006/main" xmlns:r="http://schemas.openxmlformats.org/officeDocument/2006/relationships" xmlns:p="http://schemas.openxmlformats.org/presentationml/2006/main">
+  <p:cSld>
+    <p:bg>
+      <p:bgPr>
+        <a:gradFill rotWithShape="1">
+          <a:gsLst>
+            <a:gs pos="0">
+              <a:srgbClr val="000000">
+                <a:alpha val="100000"/>
+              </a:srgbClr>
+            </a:gs>
+            <a:gs pos="100000">
+              <a:srgbClr val="3432C7">
+                <a:alpha val="100000"/>
+              </a:srgbClr>
+            </a:gs>
+          </a:gsLst>
+          <a:lin ang="5400000"/>
+        </a:gradFill>
+        <a:effectLst/>
+      </p:bgPr>
+    </p:bg>
+    <p:spTree>
+      <p:nvGrpSpPr>
+        <p:cNvPr id="1" name=""/>
+        <p:cNvGrpSpPr/>
+        <p:nvPr/>
+      </p:nvGrpSpPr>
+      <p:grpSpPr>
+        <a:xfrm>
+          <a:off x="0" y="0"/>
+          <a:ext cx="0" cy="0"/>
+          <a:chOff x="0" y="0"/>
+          <a:chExt cx="0" cy="0"/>
+        </a:xfrm>
+      </p:grpSpPr>
+      <p:sp>
+        <p:nvSpPr>
+          <p:cNvPr id="2" name="Freeform 2"/>
+          <p:cNvSpPr/>
+          <p:nvPr/>
+        </p:nvSpPr>
+        <p:spPr>
+          <a:xfrm>
+            <a:off x="0" y="0"/>
+            <a:ext cx="18288000" cy="10287000"/>
+          </a:xfrm>
+          <a:custGeom>
+            <a:avLst/>
+            <a:gdLst/>
+            <a:ahLst/>
+            <a:cxnLst/>
+            <a:rect l="l" t="t" r="r" b="b"/>
+            <a:pathLst>
+              <a:path w="18288000" h="10287000">
+                <a:moveTo>
+                  <a:pt x="0" y="0"/>
+                </a:moveTo>
+                <a:lnTo>
+                  <a:pt x="18288000" y="0"/>
+                </a:lnTo>
+                <a:lnTo>
+                  <a:pt x="18288000" y="10287000"/>
+                </a:lnTo>
+                <a:lnTo>
+                  <a:pt x="0" y="10287000"/>
+                </a:lnTo>
+                <a:lnTo>
+                  <a:pt x="0" y="0"/>
+                </a:lnTo>
+                <a:close/>
+              </a:path>
+            </a:pathLst>
+          </a:custGeom>
+          <a:blipFill>
+            <a:blip r:embed="rId1"/>
+            <a:stretch>
+              <a:fillRect l="-700" t="-10915" b="-8582"/>
+            </a:stretch>
+          </a:blipFill>
+        </p:spPr>
       </p:sp>
       <p:grpSp>
         <p:nvGrpSpPr>
@@ -7051,259 +7652,14 @@
       </p:grpSp>
       <p:sp>
         <p:nvSpPr>
-          <p:cNvPr id="6" name="Freeform 6"/>
-          <p:cNvSpPr/>
+          <p:cNvPr id="6" name="TextBox 6"/>
+          <p:cNvSpPr txBox="1"/>
           <p:nvPr/>
         </p:nvSpPr>
         <p:spPr>
           <a:xfrm>
-            <a:off x="15688714" y="251678"/>
-            <a:ext cx="2032692" cy="1458795"/>
-          </a:xfrm>
-          <a:custGeom>
-            <a:avLst/>
-            <a:gdLst/>
-            <a:ahLst/>
-            <a:cxnLst/>
-            <a:rect l="l" t="t" r="r" b="b"/>
-            <a:pathLst>
-              <a:path w="2032692" h="1458795">
-                <a:moveTo>
-                  <a:pt x="0" y="0"/>
-                </a:moveTo>
-                <a:lnTo>
-                  <a:pt x="2032691" y="0"/>
-                </a:lnTo>
-                <a:lnTo>
-                  <a:pt x="2032691" y="1458794"/>
-                </a:lnTo>
-                <a:lnTo>
-                  <a:pt x="0" y="1458794"/>
-                </a:lnTo>
-                <a:lnTo>
-                  <a:pt x="0" y="0"/>
-                </a:lnTo>
-                <a:close/>
-              </a:path>
-            </a:pathLst>
-          </a:custGeom>
-          <a:blipFill>
-            <a:blip r:embed="rId1"/>
-            <a:stretch>
-              <a:fillRect l="-17937" r="-18993" b="-27200"/>
-            </a:stretch>
-          </a:blipFill>
-        </p:spPr>
-      </p:sp>
-      <p:sp>
-        <p:nvSpPr>
-          <p:cNvPr id="7" name="Freeform 7"/>
-          <p:cNvSpPr/>
-          <p:nvPr/>
-        </p:nvSpPr>
-        <p:spPr>
-          <a:xfrm>
-            <a:off x="695939" y="301427"/>
-            <a:ext cx="3658330" cy="1359295"/>
-          </a:xfrm>
-          <a:custGeom>
-            <a:avLst/>
-            <a:gdLst/>
-            <a:ahLst/>
-            <a:cxnLst/>
-            <a:rect l="l" t="t" r="r" b="b"/>
-            <a:pathLst>
-              <a:path w="3658330" h="1359295">
-                <a:moveTo>
-                  <a:pt x="0" y="0"/>
-                </a:moveTo>
-                <a:lnTo>
-                  <a:pt x="3658331" y="0"/>
-                </a:lnTo>
-                <a:lnTo>
-                  <a:pt x="3658331" y="1359296"/>
-                </a:lnTo>
-                <a:lnTo>
-                  <a:pt x="0" y="1359296"/>
-                </a:lnTo>
-                <a:lnTo>
-                  <a:pt x="0" y="0"/>
-                </a:lnTo>
-                <a:close/>
-              </a:path>
-            </a:pathLst>
-          </a:custGeom>
-          <a:blipFill>
-            <a:blip r:embed="rId2"/>
-            <a:stretch>
-              <a:fillRect t="-35476" b="-43946"/>
-            </a:stretch>
-          </a:blipFill>
-        </p:spPr>
-      </p:sp>
-    </p:spTree>
-  </p:cSld>
-  <p:clrMapOvr>
-    <a:masterClrMapping/>
-  </p:clrMapOvr>
-</p:sld>
-</file>
-
-<file path=ppt/slides/slide7.xml><?xml version="1.0" encoding="utf-8"?>
-<p:sld xmlns:a="http://schemas.openxmlformats.org/drawingml/2006/main" xmlns:r="http://schemas.openxmlformats.org/officeDocument/2006/relationships" xmlns:p="http://schemas.openxmlformats.org/presentationml/2006/main">
-  <p:cSld>
-    <p:bg>
-      <p:bgPr>
-        <a:gradFill rotWithShape="1">
-          <a:gsLst>
-            <a:gs pos="0">
-              <a:srgbClr val="000000">
-                <a:alpha val="100000"/>
-              </a:srgbClr>
-            </a:gs>
-            <a:gs pos="100000">
-              <a:srgbClr val="3432C7">
-                <a:alpha val="100000"/>
-              </a:srgbClr>
-            </a:gs>
-          </a:gsLst>
-          <a:lin ang="5400000"/>
-        </a:gradFill>
-        <a:effectLst/>
-      </p:bgPr>
-    </p:bg>
-    <p:spTree>
-      <p:nvGrpSpPr>
-        <p:cNvPr id="1" name=""/>
-        <p:cNvGrpSpPr/>
-        <p:nvPr/>
-      </p:nvGrpSpPr>
-      <p:grpSpPr>
-        <a:xfrm>
-          <a:off x="0" y="0"/>
-          <a:ext cx="0" cy="0"/>
-          <a:chOff x="0" y="0"/>
-          <a:chExt cx="0" cy="0"/>
-        </a:xfrm>
-      </p:grpSpPr>
-      <p:grpSp>
-        <p:nvGrpSpPr>
-          <p:cNvPr id="2" name="Group 2"/>
-          <p:cNvGrpSpPr/>
-          <p:nvPr/>
-        </p:nvGrpSpPr>
-        <p:grpSpPr>
-          <a:xfrm rot="0">
-            <a:off x="601329" y="1850545"/>
-            <a:ext cx="17053525" cy="7747211"/>
-            <a:chOff x="0" y="0"/>
-            <a:chExt cx="4491463" cy="2040418"/>
-          </a:xfrm>
-        </p:grpSpPr>
-        <p:sp>
-          <p:nvSpPr>
-            <p:cNvPr id="3" name="Freeform 3"/>
-            <p:cNvSpPr/>
-            <p:nvPr/>
-          </p:nvSpPr>
-          <p:spPr>
-            <a:xfrm>
-              <a:off x="0" y="0"/>
-              <a:ext cx="4491463" cy="2040418"/>
-            </a:xfrm>
-            <a:custGeom>
-              <a:avLst/>
-              <a:gdLst/>
-              <a:ahLst/>
-              <a:cxnLst/>
-              <a:rect l="l" t="t" r="r" b="b"/>
-              <a:pathLst>
-                <a:path w="4491463" h="2040418">
-                  <a:moveTo>
-                    <a:pt x="7718" y="0"/>
-                  </a:moveTo>
-                  <a:lnTo>
-                    <a:pt x="4483746" y="0"/>
-                  </a:lnTo>
-                  <a:cubicBezTo>
-                    <a:pt x="4488008" y="0"/>
-                    <a:pt x="4491463" y="3455"/>
-                    <a:pt x="4491463" y="7718"/>
-                  </a:cubicBezTo>
-                  <a:lnTo>
-                    <a:pt x="4491463" y="2032700"/>
-                  </a:lnTo>
-                  <a:cubicBezTo>
-                    <a:pt x="4491463" y="2036962"/>
-                    <a:pt x="4488008" y="2040418"/>
-                    <a:pt x="4483746" y="2040418"/>
-                  </a:cubicBezTo>
-                  <a:lnTo>
-                    <a:pt x="7718" y="2040418"/>
-                  </a:lnTo>
-                  <a:cubicBezTo>
-                    <a:pt x="3455" y="2040418"/>
-                    <a:pt x="0" y="2036962"/>
-                    <a:pt x="0" y="2032700"/>
-                  </a:cubicBezTo>
-                  <a:lnTo>
-                    <a:pt x="0" y="7718"/>
-                  </a:lnTo>
-                  <a:cubicBezTo>
-                    <a:pt x="0" y="3455"/>
-                    <a:pt x="3455" y="0"/>
-                    <a:pt x="7718" y="0"/>
-                  </a:cubicBezTo>
-                  <a:close/>
-                </a:path>
-              </a:pathLst>
-            </a:custGeom>
-            <a:solidFill>
-              <a:srgbClr val="FFFFFF"/>
-            </a:solidFill>
-          </p:spPr>
-        </p:sp>
-        <p:sp>
-          <p:nvSpPr>
-            <p:cNvPr id="4" name="TextBox 4"/>
-            <p:cNvSpPr txBox="1"/>
-            <p:nvPr/>
-          </p:nvSpPr>
-          <p:spPr>
-            <a:xfrm>
-              <a:off x="0" y="-38100"/>
-              <a:ext cx="4491463" cy="2078518"/>
-            </a:xfrm>
-            <a:prstGeom prst="rect">
-              <a:avLst/>
-            </a:prstGeom>
-          </p:spPr>
-          <p:txBody>
-            <a:bodyPr lIns="50800" tIns="50800" rIns="50800" bIns="50800" rtlCol="0" anchor="ctr"/>
-            <a:lstStyle/>
-            <a:p>
-              <a:pPr algn="ctr">
-                <a:lnSpc>
-                  <a:spcPts val="2660"/>
-                </a:lnSpc>
-                <a:spcBef>
-                  <a:spcPct val="0"/>
-                </a:spcBef>
-              </a:pPr>
-            </a:p>
-          </p:txBody>
-        </p:sp>
-      </p:grpSp>
-      <p:sp>
-        <p:nvSpPr>
-          <p:cNvPr id="5" name="TextBox 5"/>
-          <p:cNvSpPr txBox="1"/>
-          <p:nvPr/>
-        </p:nvSpPr>
-        <p:spPr>
-          <a:xfrm>
-            <a:off x="7315200" y="694690"/>
-            <a:ext cx="4354195" cy="717550"/>
+            <a:off x="7239000" y="694690"/>
+            <a:ext cx="4159250" cy="717550"/>
           </a:xfrm>
           <a:prstGeom prst="rect">
             <a:avLst/>
@@ -7346,7 +7702,7 @@
       </p:sp>
       <p:sp>
         <p:nvSpPr>
-          <p:cNvPr id="6" name="Freeform 6"/>
+          <p:cNvPr id="7" name="Freeform 7"/>
           <p:cNvSpPr/>
           <p:nvPr/>
         </p:nvSpPr>
@@ -7383,7 +7739,7 @@
             </a:pathLst>
           </a:custGeom>
           <a:blipFill>
-            <a:blip r:embed="rId1"/>
+            <a:blip r:embed="rId2"/>
             <a:stretch>
               <a:fillRect l="-17937" r="-18993" b="-27200"/>
             </a:stretch>
@@ -7392,7 +7748,7 @@
       </p:sp>
       <p:sp>
         <p:nvSpPr>
-          <p:cNvPr id="7" name="Freeform 7"/>
+          <p:cNvPr id="8" name="Freeform 8"/>
           <p:cNvSpPr/>
           <p:nvPr/>
         </p:nvSpPr>
@@ -7429,7 +7785,7 @@
             </a:pathLst>
           </a:custGeom>
           <a:blipFill>
-            <a:blip r:embed="rId2"/>
+            <a:blip r:embed="rId3"/>
             <a:stretch>
               <a:fillRect t="-35476" b="-43946"/>
             </a:stretch>
@@ -7481,9 +7837,55 @@
           <a:chExt cx="0" cy="0"/>
         </a:xfrm>
       </p:grpSpPr>
+      <p:sp>
+        <p:nvSpPr>
+          <p:cNvPr id="2" name="Freeform 2"/>
+          <p:cNvSpPr/>
+          <p:nvPr/>
+        </p:nvSpPr>
+        <p:spPr>
+          <a:xfrm>
+            <a:off x="0" y="0"/>
+            <a:ext cx="18288000" cy="10287000"/>
+          </a:xfrm>
+          <a:custGeom>
+            <a:avLst/>
+            <a:gdLst/>
+            <a:ahLst/>
+            <a:cxnLst/>
+            <a:rect l="l" t="t" r="r" b="b"/>
+            <a:pathLst>
+              <a:path w="18288000" h="10287000">
+                <a:moveTo>
+                  <a:pt x="0" y="0"/>
+                </a:moveTo>
+                <a:lnTo>
+                  <a:pt x="18288000" y="0"/>
+                </a:lnTo>
+                <a:lnTo>
+                  <a:pt x="18288000" y="10287000"/>
+                </a:lnTo>
+                <a:lnTo>
+                  <a:pt x="0" y="10287000"/>
+                </a:lnTo>
+                <a:lnTo>
+                  <a:pt x="0" y="0"/>
+                </a:lnTo>
+                <a:close/>
+              </a:path>
+            </a:pathLst>
+          </a:custGeom>
+          <a:blipFill>
+            <a:blip r:embed="rId1"/>
+            <a:stretch>
+              <a:fillRect l="-700" t="-10915" b="-8582"/>
+            </a:stretch>
+          </a:blipFill>
+        </p:spPr>
+      </p:sp>
       <p:grpSp>
         <p:nvGrpSpPr>
-          <p:cNvPr id="2" name="Group 2"/>
+          <p:cNvPr id="3" name="Group 3"/>
           <p:cNvGrpSpPr/>
           <p:nvPr/>
         </p:nvGrpSpPr>
@@ -7497,7 +7899,7 @@
         </p:grpSpPr>
         <p:sp>
           <p:nvSpPr>
-            <p:cNvPr id="3" name="Freeform 3"/>
+            <p:cNvPr id="4" name="Freeform 4"/>
             <p:cNvSpPr/>
             <p:nvPr/>
           </p:nvSpPr>
@@ -7560,7 +7962,7 @@
         </p:sp>
         <p:sp>
           <p:nvSpPr>
-            <p:cNvPr id="4" name="TextBox 4"/>
+            <p:cNvPr id="5" name="TextBox 5"/>
             <p:cNvSpPr txBox="1"/>
             <p:nvPr/>
           </p:nvSpPr>
@@ -7591,14 +7993,14 @@
       </p:grpSp>
       <p:sp>
         <p:nvSpPr>
-          <p:cNvPr id="5" name="TextBox 5"/>
+          <p:cNvPr id="6" name="TextBox 6"/>
           <p:cNvSpPr txBox="1"/>
           <p:nvPr/>
         </p:nvSpPr>
         <p:spPr>
           <a:xfrm>
-            <a:off x="5190490" y="671195"/>
-            <a:ext cx="9662160" cy="691515"/>
+            <a:off x="5638800" y="671195"/>
+            <a:ext cx="7531100" cy="691515"/>
           </a:xfrm>
           <a:prstGeom prst="rect">
             <a:avLst/>
@@ -7625,7 +8027,7 @@
                 <a:cs typeface="League Spartan" panose="00000800000000000000"/>
                 <a:sym typeface="League Spartan" panose="00000800000000000000"/>
               </a:rPr>
-              <a:t>Visualization, Impact &amp; Next steps</a:t>
+              <a:t>Visualization, Impact &amp; Next</a:t>
             </a:r>
             <a:endParaRPr lang="en-US" sz="3855">
               <a:solidFill>
@@ -7641,7 +8043,7 @@
       </p:sp>
       <p:sp>
         <p:nvSpPr>
-          <p:cNvPr id="6" name="Freeform 6"/>
+          <p:cNvPr id="7" name="Freeform 7"/>
           <p:cNvSpPr/>
           <p:nvPr/>
         </p:nvSpPr>
@@ -7678,7 +8080,7 @@
             </a:pathLst>
           </a:custGeom>
           <a:blipFill>
-            <a:blip r:embed="rId1"/>
+            <a:blip r:embed="rId2"/>
             <a:stretch>
               <a:fillRect l="-17937" r="-18993" b="-27200"/>
             </a:stretch>
@@ -7687,7 +8089,7 @@
       </p:sp>
       <p:sp>
         <p:nvSpPr>
-          <p:cNvPr id="7" name="Freeform 7"/>
+          <p:cNvPr id="8" name="Freeform 8"/>
           <p:cNvSpPr/>
           <p:nvPr/>
         </p:nvSpPr>
@@ -7724,7 +8126,7 @@
             </a:pathLst>
           </a:custGeom>
           <a:blipFill>
-            <a:blip r:embed="rId2"/>
+            <a:blip r:embed="rId3"/>
             <a:stretch>
               <a:fillRect t="-35476" b="-43946"/>
             </a:stretch>
@@ -7776,9 +8178,55 @@
           <a:chExt cx="0" cy="0"/>
         </a:xfrm>
       </p:grpSpPr>
+      <p:sp>
+        <p:nvSpPr>
+          <p:cNvPr id="2" name="Freeform 2"/>
+          <p:cNvSpPr/>
+          <p:nvPr/>
+        </p:nvSpPr>
+        <p:spPr>
+          <a:xfrm>
+            <a:off x="0" y="0"/>
+            <a:ext cx="18288000" cy="10287000"/>
+          </a:xfrm>
+          <a:custGeom>
+            <a:avLst/>
+            <a:gdLst/>
+            <a:ahLst/>
+            <a:cxnLst/>
+            <a:rect l="l" t="t" r="r" b="b"/>
+            <a:pathLst>
+              <a:path w="18288000" h="10287000">
+                <a:moveTo>
+                  <a:pt x="0" y="0"/>
+                </a:moveTo>
+                <a:lnTo>
+                  <a:pt x="18288000" y="0"/>
+                </a:lnTo>
+                <a:lnTo>
+                  <a:pt x="18288000" y="10287000"/>
+                </a:lnTo>
+                <a:lnTo>
+                  <a:pt x="0" y="10287000"/>
+                </a:lnTo>
+                <a:lnTo>
+                  <a:pt x="0" y="0"/>
+                </a:lnTo>
+                <a:close/>
+              </a:path>
+            </a:pathLst>
+          </a:custGeom>
+          <a:blipFill>
+            <a:blip r:embed="rId1"/>
+            <a:stretch>
+              <a:fillRect l="-700" t="-10915" b="-8582"/>
+            </a:stretch>
+          </a:blipFill>
+        </p:spPr>
+      </p:sp>
       <p:grpSp>
         <p:nvGrpSpPr>
-          <p:cNvPr id="2" name="Group 2"/>
+          <p:cNvPr id="3" name="Group 3"/>
           <p:cNvGrpSpPr/>
           <p:nvPr/>
         </p:nvGrpSpPr>
@@ -7792,7 +8240,7 @@
         </p:grpSpPr>
         <p:sp>
           <p:nvSpPr>
-            <p:cNvPr id="3" name="Freeform 3"/>
+            <p:cNvPr id="4" name="Freeform 4"/>
             <p:cNvSpPr/>
             <p:nvPr/>
           </p:nvSpPr>
@@ -7855,7 +8303,7 @@
         </p:sp>
         <p:sp>
           <p:nvSpPr>
-            <p:cNvPr id="4" name="TextBox 4"/>
+            <p:cNvPr id="5" name="TextBox 5"/>
             <p:cNvSpPr txBox="1"/>
             <p:nvPr/>
           </p:nvSpPr>
@@ -7886,7 +8334,7 @@
       </p:grpSp>
       <p:sp>
         <p:nvSpPr>
-          <p:cNvPr id="5" name="TextBox 5"/>
+          <p:cNvPr id="6" name="TextBox 6"/>
           <p:cNvSpPr txBox="1"/>
           <p:nvPr/>
         </p:nvSpPr>
@@ -7936,7 +8384,7 @@
       </p:sp>
       <p:sp>
         <p:nvSpPr>
-          <p:cNvPr id="6" name="Freeform 6"/>
+          <p:cNvPr id="7" name="Freeform 7"/>
           <p:cNvSpPr/>
           <p:nvPr/>
         </p:nvSpPr>
@@ -7973,7 +8421,7 @@
             </a:pathLst>
           </a:custGeom>
           <a:blipFill>
-            <a:blip r:embed="rId1"/>
+            <a:blip r:embed="rId2"/>
             <a:stretch>
               <a:fillRect l="-17937" r="-18993" b="-27200"/>
             </a:stretch>
@@ -7982,7 +8430,7 @@
       </p:sp>
       <p:sp>
         <p:nvSpPr>
-          <p:cNvPr id="7" name="Freeform 7"/>
+          <p:cNvPr id="8" name="Freeform 8"/>
           <p:cNvSpPr/>
           <p:nvPr/>
         </p:nvSpPr>
@@ -8019,7 +8467,7 @@
             </a:pathLst>
           </a:custGeom>
           <a:blipFill>
-            <a:blip r:embed="rId2"/>
+            <a:blip r:embed="rId3"/>
             <a:stretch>
               <a:fillRect t="-35476" b="-43946"/>
             </a:stretch>
